--- a/trames/trame_arial.pptx
+++ b/trames/trame_arial.pptx
@@ -132,7 +132,7 @@
   <pc:docChgLst>
     <pc:chgData name="François THIERY" userId="49d9e14f-09e0-4f81-ad6d-421fffe7070f" providerId="ADAL" clId="{1EAFC226-11D4-4628-84D5-D25FB09CCD2F}"/>
     <pc:docChg chg="undo redo custSel addSld delSld modSld modMainMaster">
-      <pc:chgData name="François THIERY" userId="49d9e14f-09e0-4f81-ad6d-421fffe7070f" providerId="ADAL" clId="{1EAFC226-11D4-4628-84D5-D25FB09CCD2F}" dt="2026-07-09T15:35:23.237" v="4086" actId="947"/>
+      <pc:chgData name="François THIERY" userId="49d9e14f-09e0-4f81-ad6d-421fffe7070f" providerId="ADAL" clId="{1EAFC226-11D4-4628-84D5-D25FB09CCD2F}" dt="2026-07-09T17:00:50.906" v="4160" actId="20577"/>
       <pc:docMkLst>
         <pc:docMk/>
       </pc:docMkLst>
@@ -144,13 +144,13 @@
         </pc:sldMkLst>
       </pc:sldChg>
       <pc:sldChg chg="delSp modSp mod">
-        <pc:chgData name="François THIERY" userId="49d9e14f-09e0-4f81-ad6d-421fffe7070f" providerId="ADAL" clId="{1EAFC226-11D4-4628-84D5-D25FB09CCD2F}" dt="2026-07-09T15:15:51.412" v="3846" actId="2711"/>
+        <pc:chgData name="François THIERY" userId="49d9e14f-09e0-4f81-ad6d-421fffe7070f" providerId="ADAL" clId="{1EAFC226-11D4-4628-84D5-D25FB09CCD2F}" dt="2026-07-09T17:00:50.906" v="4160" actId="20577"/>
         <pc:sldMkLst>
           <pc:docMk/>
           <pc:sldMk cId="3390595401" sldId="259"/>
         </pc:sldMkLst>
         <pc:spChg chg="mod">
-          <ac:chgData name="François THIERY" userId="49d9e14f-09e0-4f81-ad6d-421fffe7070f" providerId="ADAL" clId="{1EAFC226-11D4-4628-84D5-D25FB09CCD2F}" dt="2026-07-08T14:15:19.518" v="3246" actId="1037"/>
+          <ac:chgData name="François THIERY" userId="49d9e14f-09e0-4f81-ad6d-421fffe7070f" providerId="ADAL" clId="{1EAFC226-11D4-4628-84D5-D25FB09CCD2F}" dt="2026-07-09T16:59:36.093" v="4100" actId="947"/>
           <ac:spMkLst>
             <pc:docMk/>
             <pc:sldMk cId="3390595401" sldId="259"/>
@@ -174,7 +174,7 @@
           </ac:spMkLst>
         </pc:spChg>
         <pc:graphicFrameChg chg="mod modGraphic">
-          <ac:chgData name="François THIERY" userId="49d9e14f-09e0-4f81-ad6d-421fffe7070f" providerId="ADAL" clId="{1EAFC226-11D4-4628-84D5-D25FB09CCD2F}" dt="2026-07-08T14:15:34.506" v="3314"/>
+          <ac:chgData name="François THIERY" userId="49d9e14f-09e0-4f81-ad6d-421fffe7070f" providerId="ADAL" clId="{1EAFC226-11D4-4628-84D5-D25FB09CCD2F}" dt="2026-07-09T17:00:50.906" v="4160" actId="20577"/>
           <ac:graphicFrameMkLst>
             <pc:docMk/>
             <pc:sldMk cId="3390595401" sldId="259"/>
@@ -447,7 +447,7 @@
         </pc:sldMkLst>
       </pc:sldChg>
       <pc:sldMasterChg chg="addSldLayout modSldLayout sldLayoutOrd">
-        <pc:chgData name="François THIERY" userId="49d9e14f-09e0-4f81-ad6d-421fffe7070f" providerId="ADAL" clId="{1EAFC226-11D4-4628-84D5-D25FB09CCD2F}" dt="2026-07-09T15:35:23.237" v="4086" actId="947"/>
+        <pc:chgData name="François THIERY" userId="49d9e14f-09e0-4f81-ad6d-421fffe7070f" providerId="ADAL" clId="{1EAFC226-11D4-4628-84D5-D25FB09CCD2F}" dt="2026-07-09T16:59:04.544" v="4098" actId="1036"/>
         <pc:sldMasterMkLst>
           <pc:docMk/>
           <pc:sldMasterMk cId="998767469" sldId="2147483672"/>
@@ -577,7 +577,7 @@
           </pc:spChg>
         </pc:sldLayoutChg>
         <pc:sldLayoutChg chg="modSp mod ord">
-          <pc:chgData name="François THIERY" userId="49d9e14f-09e0-4f81-ad6d-421fffe7070f" providerId="ADAL" clId="{1EAFC226-11D4-4628-84D5-D25FB09CCD2F}" dt="2026-07-09T15:19:50.888" v="3869" actId="113"/>
+          <pc:chgData name="François THIERY" userId="49d9e14f-09e0-4f81-ad6d-421fffe7070f" providerId="ADAL" clId="{1EAFC226-11D4-4628-84D5-D25FB09CCD2F}" dt="2026-07-09T16:59:04.544" v="4098" actId="1036"/>
           <pc:sldLayoutMkLst>
             <pc:docMk/>
             <pc:sldMasterMk cId="998767469" sldId="2147483672"/>
@@ -590,6 +590,15 @@
               <pc:sldMasterMk cId="998767469" sldId="2147483672"/>
               <pc:sldLayoutMk cId="2553854360" sldId="2147483685"/>
               <ac:spMk id="2" creationId="{20602CA8-C311-2EB3-CA06-190BAA07DA92}"/>
+            </ac:spMkLst>
+          </pc:spChg>
+          <pc:spChg chg="mod">
+            <ac:chgData name="François THIERY" userId="49d9e14f-09e0-4f81-ad6d-421fffe7070f" providerId="ADAL" clId="{1EAFC226-11D4-4628-84D5-D25FB09CCD2F}" dt="2026-07-09T16:59:04.544" v="4098" actId="1036"/>
+            <ac:spMkLst>
+              <pc:docMk/>
+              <pc:sldMasterMk cId="998767469" sldId="2147483672"/>
+              <pc:sldLayoutMk cId="2553854360" sldId="2147483685"/>
+              <ac:spMk id="6" creationId="{1199785F-868A-EFB7-2816-EC18819373D0}"/>
             </ac:spMkLst>
           </pc:spChg>
           <pc:spChg chg="mod">
@@ -2450,7 +2459,7 @@
         <p:spPr>
           <a:xfrm>
             <a:off x="0" y="6369627"/>
-            <a:ext cx="10691813" cy="1190048"/>
+            <a:ext cx="10684800" cy="1180800"/>
           </a:xfrm>
           <a:prstGeom prst="rect">
             <a:avLst/>
@@ -2458,7 +2467,7 @@
           <a:solidFill>
             <a:schemeClr val="bg1"/>
           </a:solidFill>
-          <a:ln w="12700">
+          <a:ln w="6350">
             <a:solidFill>
               <a:schemeClr val="bg1"/>
             </a:solidFill>
@@ -14704,14 +14713,14 @@
           <a:lstStyle/>
           <a:p>
             <a:r>
-              <a:rPr lang="fr-FR" sz="2000" b="1" dirty="0">
-                <a:latin typeface="Segoe UI" panose="020B0502040204020203" pitchFamily="34" charset="0"/>
+              <a:rPr lang="fr-FR" sz="2000" b="1" spc="100" dirty="0">
+                <a:latin typeface="Arial Nova Light" panose="020B0304020202020204" pitchFamily="34" charset="0"/>
                 <a:cs typeface="Segoe UI" panose="020B0502040204020203" pitchFamily="34" charset="0"/>
               </a:rPr>
               <a:t>Sommaire</a:t>
             </a:r>
-            <a:endParaRPr lang="en-GB" sz="2000" b="1" dirty="0">
-              <a:latin typeface="Segoe UI" panose="020B0502040204020203" pitchFamily="34" charset="0"/>
+            <a:endParaRPr lang="en-GB" sz="2000" b="1" spc="100" dirty="0">
+              <a:latin typeface="Arial Nova Light" panose="020B0304020202020204" pitchFamily="34" charset="0"/>
               <a:cs typeface="Segoe UI" panose="020B0502040204020203" pitchFamily="34" charset="0"/>
             </a:endParaRPr>
           </a:p>
@@ -14908,7 +14917,7 @@
           <p:nvPr>
             <p:extLst>
               <p:ext uri="{D42A27DB-BD31-4B8C-83A1-F6EECF244321}">
-                <p14:modId xmlns:p14="http://schemas.microsoft.com/office/powerpoint/2010/main" val="3428655479"/>
+                <p14:modId xmlns:p14="http://schemas.microsoft.com/office/powerpoint/2010/main" val="1877967371"/>
               </p:ext>
             </p:extLst>
           </p:nvPr>
@@ -14951,24 +14960,24 @@
                         </a:spcAft>
                       </a:pPr>
                       <a:r>
-                        <a:rPr lang="fr-FR" sz="1100" b="0" noProof="0" dirty="0">
+                        <a:rPr lang="fr-FR" sz="1100" b="0" spc="100" baseline="0" noProof="0" dirty="0">
                           <a:solidFill>
                             <a:schemeClr val="tx1"/>
                           </a:solidFill>
-                          <a:latin typeface="Segoe UI" panose="020B0502040204020203" pitchFamily="34" charset="0"/>
+                          <a:latin typeface="Arial Nova Light" panose="020B0304020202020204" pitchFamily="34" charset="0"/>
                           <a:cs typeface="Segoe UI" panose="020B0502040204020203" pitchFamily="34" charset="0"/>
                         </a:rPr>
                         <a:t>Contexte de l’opération</a:t>
                       </a:r>
                       <a:r>
-                        <a:rPr lang="en-US" sz="1100" b="0" noProof="0" dirty="0">
+                        <a:rPr lang="en-US" sz="1100" b="0" spc="100" baseline="0" noProof="0" dirty="0">
                           <a:solidFill>
                             <a:schemeClr val="tx1"/>
                           </a:solidFill>
-                          <a:latin typeface="Segoe UI" panose="020B0502040204020203" pitchFamily="34" charset="0"/>
+                          <a:latin typeface="Arial Nova Light" panose="020B0304020202020204" pitchFamily="34" charset="0"/>
                           <a:cs typeface="Segoe UI" panose="020B0502040204020203" pitchFamily="34" charset="0"/>
                         </a:rPr>
-                        <a:t>……………………………………………...........................</a:t>
+                        <a:t>……………………………………….</a:t>
                       </a:r>
                     </a:p>
                   </a:txBody>
@@ -15007,43 +15016,43 @@
                         </a:spcAft>
                       </a:pPr>
                       <a:r>
-                        <a:rPr lang="fr-FR" sz="1100" b="0" dirty="0">
+                        <a:rPr lang="fr-FR" sz="1100" b="0" spc="100" baseline="0" dirty="0">
                           <a:solidFill>
                             <a:schemeClr val="tx1"/>
                           </a:solidFill>
-                          <a:latin typeface="Segoe UI" panose="020B0502040204020203" pitchFamily="34" charset="0"/>
+                          <a:latin typeface="Arial Nova Light" panose="020B0304020202020204" pitchFamily="34" charset="0"/>
                           <a:cs typeface="Segoe UI" panose="020B0502040204020203" pitchFamily="34" charset="0"/>
                         </a:rPr>
                         <a:t>[</a:t>
                       </a:r>
                       <a:r>
-                        <a:rPr lang="fr-FR" sz="1100" b="0" dirty="0">
+                        <a:rPr lang="fr-FR" sz="1100" b="0" spc="100" baseline="0" dirty="0">
                           <a:solidFill>
                             <a:schemeClr val="tx1"/>
                           </a:solidFill>
                           <a:highlight>
                             <a:srgbClr val="FFFF00"/>
                           </a:highlight>
-                          <a:latin typeface="Segoe UI" panose="020B0502040204020203" pitchFamily="34" charset="0"/>
+                          <a:latin typeface="Arial Nova Light" panose="020B0304020202020204" pitchFamily="34" charset="0"/>
                           <a:cs typeface="Segoe UI" panose="020B0502040204020203" pitchFamily="34" charset="0"/>
                         </a:rPr>
                         <a:t>x</a:t>
                       </a:r>
                       <a:r>
-                        <a:rPr lang="fr-FR" sz="1100" b="0" dirty="0">
+                        <a:rPr lang="fr-FR" sz="1100" b="0" spc="100" baseline="0" dirty="0">
                           <a:solidFill>
                             <a:schemeClr val="tx1"/>
                           </a:solidFill>
-                          <a:latin typeface="Segoe UI" panose="020B0502040204020203" pitchFamily="34" charset="0"/>
+                          <a:latin typeface="Arial Nova Light" panose="020B0304020202020204" pitchFamily="34" charset="0"/>
                           <a:cs typeface="Segoe UI" panose="020B0502040204020203" pitchFamily="34" charset="0"/>
                         </a:rPr>
                         <a:t>]</a:t>
                       </a:r>
-                      <a:endParaRPr lang="en-GB" sz="1100" b="0" dirty="0">
+                      <a:endParaRPr lang="en-GB" sz="1100" b="0" spc="100" baseline="0" dirty="0">
                         <a:solidFill>
                           <a:schemeClr val="tx1"/>
                         </a:solidFill>
-                        <a:latin typeface="Segoe UI" panose="020B0502040204020203" pitchFamily="34" charset="0"/>
+                        <a:latin typeface="Arial Nova Light" panose="020B0304020202020204" pitchFamily="34" charset="0"/>
                         <a:cs typeface="Segoe UI" panose="020B0502040204020203" pitchFamily="34" charset="0"/>
                       </a:endParaRPr>
                     </a:p>
@@ -15102,20 +15111,20 @@
                         <a:defRPr/>
                       </a:pPr>
                       <a:r>
-                        <a:rPr lang="fr-FR" sz="1100" b="0" dirty="0">
+                        <a:rPr lang="fr-FR" sz="1100" b="0" spc="100" baseline="0" dirty="0">
                           <a:solidFill>
                             <a:schemeClr val="tx1"/>
                           </a:solidFill>
-                          <a:latin typeface="Segoe UI" panose="020B0502040204020203" pitchFamily="34" charset="0"/>
+                          <a:latin typeface="Arial Nova Light" panose="020B0304020202020204" pitchFamily="34" charset="0"/>
                           <a:cs typeface="Segoe UI" panose="020B0502040204020203" pitchFamily="34" charset="0"/>
                         </a:rPr>
-                        <a:t>Périmètre des travaux……………………………………………………………………</a:t>
+                        <a:t>Périmètre des travaux…………………………………………</a:t>
                       </a:r>
-                      <a:endParaRPr lang="en-GB" sz="1100" b="0" dirty="0">
+                      <a:endParaRPr lang="en-GB" sz="1100" b="0" spc="100" baseline="0" dirty="0">
                         <a:solidFill>
                           <a:schemeClr val="tx1"/>
                         </a:solidFill>
-                        <a:latin typeface="Segoe UI" panose="020B0502040204020203" pitchFamily="34" charset="0"/>
+                        <a:latin typeface="Arial Nova Light" panose="020B0304020202020204" pitchFamily="34" charset="0"/>
                         <a:cs typeface="Segoe UI" panose="020B0502040204020203" pitchFamily="34" charset="0"/>
                       </a:endParaRPr>
                     </a:p>
@@ -15155,34 +15164,34 @@
                         </a:spcAft>
                       </a:pPr>
                       <a:r>
-                        <a:rPr lang="en-GB" sz="1100" b="0" dirty="0">
+                        <a:rPr lang="en-GB" sz="1100" b="0" spc="100" baseline="0" dirty="0">
                           <a:solidFill>
                             <a:schemeClr val="tx1"/>
                           </a:solidFill>
-                          <a:latin typeface="Segoe UI" panose="020B0502040204020203" pitchFamily="34" charset="0"/>
+                          <a:latin typeface="Arial Nova Light" panose="020B0304020202020204" pitchFamily="34" charset="0"/>
                           <a:cs typeface="Segoe UI" panose="020B0502040204020203" pitchFamily="34" charset="0"/>
                         </a:rPr>
                         <a:t>[</a:t>
                       </a:r>
                       <a:r>
-                        <a:rPr lang="en-GB" sz="1100" b="0" dirty="0">
+                        <a:rPr lang="en-GB" sz="1100" b="0" spc="100" baseline="0" dirty="0">
                           <a:solidFill>
                             <a:schemeClr val="tx1"/>
                           </a:solidFill>
                           <a:highlight>
                             <a:srgbClr val="FFFF00"/>
                           </a:highlight>
-                          <a:latin typeface="Segoe UI" panose="020B0502040204020203" pitchFamily="34" charset="0"/>
+                          <a:latin typeface="Arial Nova Light" panose="020B0304020202020204" pitchFamily="34" charset="0"/>
                           <a:cs typeface="Segoe UI" panose="020B0502040204020203" pitchFamily="34" charset="0"/>
                         </a:rPr>
                         <a:t>x</a:t>
                       </a:r>
                       <a:r>
-                        <a:rPr lang="en-GB" sz="1100" b="0" dirty="0">
+                        <a:rPr lang="en-GB" sz="1100" b="0" spc="100" baseline="0" dirty="0">
                           <a:solidFill>
                             <a:schemeClr val="tx1"/>
                           </a:solidFill>
-                          <a:latin typeface="Segoe UI" panose="020B0502040204020203" pitchFamily="34" charset="0"/>
+                          <a:latin typeface="Arial Nova Light" panose="020B0304020202020204" pitchFamily="34" charset="0"/>
                           <a:cs typeface="Segoe UI" panose="020B0502040204020203" pitchFamily="34" charset="0"/>
                         </a:rPr>
                         <a:t>]</a:t>
@@ -15231,24 +15240,24 @@
                         </a:spcAft>
                       </a:pPr>
                       <a:r>
-                        <a:rPr lang="fr-FR" sz="1100" b="0" noProof="0" dirty="0">
+                        <a:rPr lang="fr-FR" sz="1100" b="0" spc="100" baseline="0" noProof="0" dirty="0">
                           <a:solidFill>
                             <a:schemeClr val="tx1"/>
                           </a:solidFill>
-                          <a:latin typeface="Segoe UI" panose="020B0502040204020203" pitchFamily="34" charset="0"/>
+                          <a:latin typeface="Arial Nova Light" panose="020B0304020202020204" pitchFamily="34" charset="0"/>
                           <a:cs typeface="Segoe UI" panose="020B0502040204020203" pitchFamily="34" charset="0"/>
                         </a:rPr>
                         <a:t>Conditions d’intervention</a:t>
                       </a:r>
                       <a:r>
-                        <a:rPr lang="en-US" sz="1100" b="0" noProof="0" dirty="0">
+                        <a:rPr lang="en-US" sz="1100" b="0" spc="100" baseline="0" noProof="0" dirty="0">
                           <a:solidFill>
                             <a:schemeClr val="tx1"/>
                           </a:solidFill>
-                          <a:latin typeface="Segoe UI" panose="020B0502040204020203" pitchFamily="34" charset="0"/>
+                          <a:latin typeface="Arial Nova Light" panose="020B0304020202020204" pitchFamily="34" charset="0"/>
                           <a:cs typeface="Segoe UI" panose="020B0502040204020203" pitchFamily="34" charset="0"/>
                         </a:rPr>
-                        <a:t>………………………………………………………………</a:t>
+                        <a:t>…………………………………….</a:t>
                       </a:r>
                     </a:p>
                   </a:txBody>
@@ -15287,34 +15296,34 @@
                         </a:spcAft>
                       </a:pPr>
                       <a:r>
-                        <a:rPr lang="en-GB" sz="1100" b="0" dirty="0">
+                        <a:rPr lang="en-GB" sz="1100" b="0" spc="100" baseline="0" dirty="0">
                           <a:solidFill>
                             <a:schemeClr val="tx1"/>
                           </a:solidFill>
-                          <a:latin typeface="Segoe UI" panose="020B0502040204020203" pitchFamily="34" charset="0"/>
+                          <a:latin typeface="Arial Nova Light" panose="020B0304020202020204" pitchFamily="34" charset="0"/>
                           <a:cs typeface="Segoe UI" panose="020B0502040204020203" pitchFamily="34" charset="0"/>
                         </a:rPr>
                         <a:t>[</a:t>
                       </a:r>
                       <a:r>
-                        <a:rPr lang="en-GB" sz="1100" b="0" dirty="0">
+                        <a:rPr lang="en-GB" sz="1100" b="0" spc="100" baseline="0" dirty="0">
                           <a:solidFill>
                             <a:schemeClr val="tx1"/>
                           </a:solidFill>
                           <a:highlight>
                             <a:srgbClr val="FFFF00"/>
                           </a:highlight>
-                          <a:latin typeface="Segoe UI" panose="020B0502040204020203" pitchFamily="34" charset="0"/>
+                          <a:latin typeface="Arial Nova Light" panose="020B0304020202020204" pitchFamily="34" charset="0"/>
                           <a:cs typeface="Segoe UI" panose="020B0502040204020203" pitchFamily="34" charset="0"/>
                         </a:rPr>
                         <a:t>x</a:t>
                       </a:r>
                       <a:r>
-                        <a:rPr lang="en-GB" sz="1100" b="0" dirty="0">
+                        <a:rPr lang="en-GB" sz="1100" b="0" spc="100" baseline="0" dirty="0">
                           <a:solidFill>
                             <a:schemeClr val="tx1"/>
                           </a:solidFill>
-                          <a:latin typeface="Segoe UI" panose="020B0502040204020203" pitchFamily="34" charset="0"/>
+                          <a:latin typeface="Arial Nova Light" panose="020B0304020202020204" pitchFamily="34" charset="0"/>
                           <a:cs typeface="Segoe UI" panose="020B0502040204020203" pitchFamily="34" charset="0"/>
                         </a:rPr>
                         <a:t>]</a:t>
